--- a/Assets/Menu/TournamentMenu/TournamentMenu.pptx
+++ b/Assets/Menu/TournamentMenu/TournamentMenu.pptx
@@ -11114,7 +11114,7 @@
                 <a:cs typeface="Calibri"/>
                 <a:sym typeface="Calibri"/>
               </a:rPr>
-              <a:t>Nachos w/ Cheese</a:t>
+              <a:t>Nachos</a:t>
             </a:r>
           </a:p>
           <a:p>
@@ -11222,20 +11222,14 @@
           </a:p>
           <a:p>
             <a:r>
-              <a:rPr lang="en-US" sz="2700" b="1" dirty="0" err="1">
+              <a:rPr lang="en-US" sz="2700" b="1" dirty="0">
                 <a:latin typeface="Calibri"/>
                 <a:ea typeface="Calibri"/>
                 <a:cs typeface="Calibri"/>
                 <a:sym typeface="Calibri"/>
               </a:rPr>
-              <a:t>Icee</a:t>
+              <a:t>Fla-Vor-Ice</a:t>
             </a:r>
-            <a:endParaRPr lang="en-US" sz="2700" b="1" dirty="0">
-              <a:latin typeface="Calibri"/>
-              <a:ea typeface="Calibri"/>
-              <a:cs typeface="Calibri"/>
-              <a:sym typeface="Calibri"/>
-            </a:endParaRPr>
           </a:p>
         </p:txBody>
       </p:sp>
@@ -11308,7 +11302,7 @@
         <p:spPr>
           <a:xfrm>
             <a:off x="12216861" y="3865157"/>
-            <a:ext cx="2794273" cy="1762680"/>
+            <a:ext cx="2794273" cy="1938948"/>
           </a:xfrm>
           <a:prstGeom prst="rect">
             <a:avLst/>
@@ -11331,7 +11325,7 @@
                 <a:cs typeface="Calibri"/>
                 <a:sym typeface="Calibri"/>
               </a:rPr>
-              <a:t>Chips</a:t>
+              <a:t>Candy</a:t>
             </a:r>
           </a:p>
           <a:p>
@@ -11342,7 +11336,7 @@
                 <a:cs typeface="Calibri"/>
                 <a:sym typeface="Calibri"/>
               </a:rPr>
-              <a:t>Candy</a:t>
+              <a:t>Chips</a:t>
             </a:r>
           </a:p>
           <a:p>
@@ -11407,6 +11401,17 @@
                 <a:cs typeface="Calibri"/>
                 <a:sym typeface="Calibri"/>
               </a:rPr>
+              <a:t>Gatorade </a:t>
+            </a:r>
+          </a:p>
+          <a:p>
+            <a:r>
+              <a:rPr lang="en-US" sz="2700" b="1" dirty="0">
+                <a:latin typeface="Calibri"/>
+                <a:ea typeface="Calibri"/>
+                <a:cs typeface="Calibri"/>
+                <a:sym typeface="Calibri"/>
+              </a:rPr>
               <a:t>Water</a:t>
             </a:r>
           </a:p>
@@ -11419,17 +11424,6 @@
                 <a:sym typeface="Calibri"/>
               </a:rPr>
               <a:t>Pop</a:t>
-            </a:r>
-          </a:p>
-          <a:p>
-            <a:r>
-              <a:rPr lang="en-US" sz="2700" b="1" dirty="0">
-                <a:latin typeface="Calibri"/>
-                <a:ea typeface="Calibri"/>
-                <a:cs typeface="Calibri"/>
-                <a:sym typeface="Calibri"/>
-              </a:rPr>
-              <a:t>Gatorade</a:t>
             </a:r>
           </a:p>
           <a:p>
@@ -11668,7 +11662,7 @@
                 <a:cs typeface="Calibri"/>
                 <a:sym typeface="Calibri"/>
               </a:rPr>
-              <a:t>$2.00</a:t>
+              <a:t>$2.50</a:t>
             </a:r>
           </a:p>
           <a:p>
@@ -11754,7 +11748,7 @@
                 <a:cs typeface="Calibri"/>
                 <a:sym typeface="Calibri"/>
               </a:rPr>
-              <a:t>$1.00 - $3.00</a:t>
+              <a:t>$3.00</a:t>
             </a:r>
             <a:endParaRPr sz="2700" b="1" dirty="0">
               <a:latin typeface="Calibri"/>
@@ -11798,7 +11792,7 @@
         <p:spPr>
           <a:xfrm>
             <a:off x="16715018" y="3875315"/>
-            <a:ext cx="1122694" cy="1762680"/>
+            <a:ext cx="1122694" cy="1938948"/>
           </a:xfrm>
           <a:prstGeom prst="rect">
             <a:avLst/>
@@ -11822,7 +11816,7 @@
                 <a:cs typeface="Calibri"/>
                 <a:sym typeface="Calibri"/>
               </a:rPr>
-              <a:t>$1.50</a:t>
+              <a:t>$2.00</a:t>
             </a:r>
           </a:p>
           <a:p>
@@ -11834,7 +11828,7 @@
                 <a:cs typeface="Calibri"/>
                 <a:sym typeface="Calibri"/>
               </a:rPr>
-              <a:t>$2.00</a:t>
+              <a:t>$1.50</a:t>
             </a:r>
             <a:endParaRPr sz="2700" b="1" dirty="0">
               <a:latin typeface="Calibri"/>
@@ -11976,7 +11970,7 @@
                 <a:cs typeface="Calibri"/>
                 <a:sym typeface="Calibri"/>
               </a:rPr>
-              <a:t>$2.00</a:t>
+              <a:t>$3.00</a:t>
             </a:r>
           </a:p>
           <a:p>
@@ -12000,7 +11994,7 @@
                 <a:cs typeface="Calibri"/>
                 <a:sym typeface="Calibri"/>
               </a:rPr>
-              <a:t>$3.00</a:t>
+              <a:t>$2.00</a:t>
             </a:r>
           </a:p>
           <a:p>

--- a/Assets/Menu/TournamentMenu/TournamentMenu.pptx
+++ b/Assets/Menu/TournamentMenu/TournamentMenu.pptx
@@ -10632,8 +10632,8 @@
         </p:nvSpPr>
         <p:spPr>
           <a:xfrm>
-            <a:off x="429119" y="361060"/>
-            <a:ext cx="5595904" cy="6735479"/>
+            <a:off x="429119" y="361061"/>
+            <a:ext cx="5595904" cy="6277302"/>
           </a:xfrm>
           <a:prstGeom prst="roundRect">
             <a:avLst>
@@ -11003,7 +11003,7 @@
         <p:spPr>
           <a:xfrm>
             <a:off x="623942" y="1330503"/>
-            <a:ext cx="4038729" cy="5678433"/>
+            <a:ext cx="4038729" cy="5262935"/>
           </a:xfrm>
           <a:prstGeom prst="rect">
             <a:avLst/>
@@ -11027,17 +11027,6 @@
                 <a:sym typeface="Calibri"/>
               </a:rPr>
               <a:t>Pulled Pork Nachos</a:t>
-            </a:r>
-          </a:p>
-          <a:p>
-            <a:r>
-              <a:rPr lang="en-US" sz="2700" b="1" dirty="0">
-                <a:latin typeface="Calibri"/>
-                <a:ea typeface="Calibri"/>
-                <a:cs typeface="Calibri"/>
-                <a:sym typeface="Calibri"/>
-              </a:rPr>
-              <a:t>Popcorn Chicken</a:t>
             </a:r>
           </a:p>
           <a:p>
@@ -11301,7 +11290,7 @@
         </p:nvSpPr>
         <p:spPr>
           <a:xfrm>
-            <a:off x="12216861" y="3865157"/>
+            <a:off x="12216861" y="3805523"/>
             <a:ext cx="2794273" cy="1938948"/>
           </a:xfrm>
           <a:prstGeom prst="rect">
@@ -11506,7 +11495,7 @@
         <p:spPr>
           <a:xfrm>
             <a:off x="4523526" y="1330503"/>
-            <a:ext cx="1280708" cy="5678433"/>
+            <a:ext cx="1280708" cy="5262935"/>
           </a:xfrm>
           <a:prstGeom prst="rect">
             <a:avLst/>
@@ -11531,18 +11520,6 @@
                 <a:sym typeface="Calibri"/>
               </a:rPr>
               <a:t>$6.00</a:t>
-            </a:r>
-          </a:p>
-          <a:p>
-            <a:pPr algn="r"/>
-            <a:r>
-              <a:rPr lang="en-US" sz="2700" b="1" dirty="0">
-                <a:latin typeface="Calibri"/>
-                <a:ea typeface="Calibri"/>
-                <a:cs typeface="Calibri"/>
-                <a:sym typeface="Calibri"/>
-              </a:rPr>
-              <a:t>$4.00</a:t>
             </a:r>
           </a:p>
           <a:p>
@@ -11791,7 +11768,7 @@
         </p:nvSpPr>
         <p:spPr>
           <a:xfrm>
-            <a:off x="16715018" y="3875315"/>
+            <a:off x="16715018" y="3815681"/>
             <a:ext cx="1122694" cy="1938948"/>
           </a:xfrm>
           <a:prstGeom prst="rect">
@@ -12126,7 +12103,7 @@
         <p:spPr>
           <a:xfrm>
             <a:off x="454037" y="7269795"/>
-            <a:ext cx="5639850" cy="2627420"/>
+            <a:ext cx="5639850" cy="2305593"/>
           </a:xfrm>
           <a:prstGeom prst="roundRect">
             <a:avLst>
@@ -12195,7 +12172,7 @@
         <p:spPr>
           <a:xfrm>
             <a:off x="439321" y="7970495"/>
-            <a:ext cx="4048572" cy="1938948"/>
+            <a:ext cx="4048572" cy="1523450"/>
           </a:xfrm>
           <a:prstGeom prst="rect">
             <a:avLst/>
@@ -12210,17 +12187,6 @@
             <a:spAutoFit/>
           </a:bodyPr>
           <a:lstStyle/>
-          <a:p>
-            <a:r>
-              <a:rPr lang="en-US" sz="2700" b="1" dirty="0">
-                <a:latin typeface="Calibri"/>
-                <a:ea typeface="Calibri"/>
-                <a:cs typeface="Calibri"/>
-                <a:sym typeface="Calibri"/>
-              </a:rPr>
-              <a:t>+Fries</a:t>
-            </a:r>
-          </a:p>
           <a:p>
             <a:r>
               <a:rPr lang="en-US" sz="2700" b="1" dirty="0">
@@ -12271,7 +12237,7 @@
         <p:spPr>
           <a:xfrm>
             <a:off x="4622207" y="7958267"/>
-            <a:ext cx="1303499" cy="1938948"/>
+            <a:ext cx="1303499" cy="1523450"/>
           </a:xfrm>
           <a:prstGeom prst="rect">
             <a:avLst/>
@@ -12286,18 +12252,6 @@
             <a:spAutoFit/>
           </a:bodyPr>
           <a:lstStyle/>
-          <a:p>
-            <a:pPr algn="r"/>
-            <a:r>
-              <a:rPr lang="en-US" sz="2700" b="1" dirty="0">
-                <a:latin typeface="Calibri"/>
-                <a:ea typeface="Calibri"/>
-                <a:cs typeface="Calibri"/>
-                <a:sym typeface="Calibri"/>
-              </a:rPr>
-              <a:t>$3.00</a:t>
-            </a:r>
-          </a:p>
           <a:p>
             <a:pPr algn="r"/>
             <a:r>

--- a/Assets/Menu/TournamentMenu/TournamentMenu.pptx
+++ b/Assets/Menu/TournamentMenu/TournamentMenu.pptx
@@ -10633,7 +10633,7 @@
         <p:spPr>
           <a:xfrm>
             <a:off x="429119" y="361061"/>
-            <a:ext cx="5595904" cy="6277302"/>
+            <a:ext cx="5595904" cy="6735478"/>
           </a:xfrm>
           <a:prstGeom prst="roundRect">
             <a:avLst>
@@ -11003,7 +11003,7 @@
         <p:spPr>
           <a:xfrm>
             <a:off x="623942" y="1330503"/>
-            <a:ext cx="4038729" cy="5262935"/>
+            <a:ext cx="4038729" cy="5678433"/>
           </a:xfrm>
           <a:prstGeom prst="rect">
             <a:avLst/>
@@ -11060,6 +11060,17 @@
                 <a:sym typeface="Calibri"/>
               </a:rPr>
               <a:t>    + BBQ &amp; Cheese</a:t>
+            </a:r>
+          </a:p>
+          <a:p>
+            <a:r>
+              <a:rPr lang="en-US" sz="2700" b="1" dirty="0">
+                <a:latin typeface="Calibri"/>
+                <a:ea typeface="Calibri"/>
+                <a:cs typeface="Calibri"/>
+                <a:sym typeface="Calibri"/>
+              </a:rPr>
+              <a:t>Walking Tacos</a:t>
             </a:r>
           </a:p>
           <a:p>
@@ -11495,7 +11506,7 @@
         <p:spPr>
           <a:xfrm>
             <a:off x="4523526" y="1330503"/>
-            <a:ext cx="1280708" cy="5262935"/>
+            <a:ext cx="1280708" cy="5678433"/>
           </a:xfrm>
           <a:prstGeom prst="rect">
             <a:avLst/>
@@ -11556,6 +11567,18 @@
                 <a:sym typeface="Calibri"/>
               </a:rPr>
               <a:t>$8.00</a:t>
+            </a:r>
+          </a:p>
+          <a:p>
+            <a:pPr algn="r"/>
+            <a:r>
+              <a:rPr lang="en-US" sz="2700" b="1" dirty="0">
+                <a:latin typeface="Calibri"/>
+                <a:ea typeface="Calibri"/>
+                <a:cs typeface="Calibri"/>
+                <a:sym typeface="Calibri"/>
+              </a:rPr>
+              <a:t>$5.00</a:t>
             </a:r>
           </a:p>
           <a:p>

--- a/Assets/Menu/TournamentMenu/TournamentMenu.pptx
+++ b/Assets/Menu/TournamentMenu/TournamentMenu.pptx
@@ -10633,7 +10633,7 @@
         <p:spPr>
           <a:xfrm>
             <a:off x="429119" y="361061"/>
-            <a:ext cx="5595904" cy="6735478"/>
+            <a:ext cx="5595904" cy="6069556"/>
           </a:xfrm>
           <a:prstGeom prst="roundRect">
             <a:avLst>
@@ -11003,7 +11003,7 @@
         <p:spPr>
           <a:xfrm>
             <a:off x="623942" y="1330503"/>
-            <a:ext cx="4038729" cy="5678433"/>
+            <a:ext cx="4038729" cy="4847436"/>
           </a:xfrm>
           <a:prstGeom prst="rect">
             <a:avLst/>
@@ -11038,28 +11038,6 @@
                 <a:sym typeface="Calibri"/>
               </a:rPr>
               <a:t>French Fries</a:t>
-            </a:r>
-          </a:p>
-          <a:p>
-            <a:r>
-              <a:rPr lang="en-US" sz="2700" b="1" dirty="0">
-                <a:latin typeface="Calibri"/>
-                <a:ea typeface="Calibri"/>
-                <a:cs typeface="Calibri"/>
-                <a:sym typeface="Calibri"/>
-              </a:rPr>
-              <a:t>Baked Potato</a:t>
-            </a:r>
-          </a:p>
-          <a:p>
-            <a:r>
-              <a:rPr lang="en-US" sz="2700" b="1" dirty="0">
-                <a:latin typeface="Calibri"/>
-                <a:ea typeface="Calibri"/>
-                <a:cs typeface="Calibri"/>
-                <a:sym typeface="Calibri"/>
-              </a:rPr>
-              <a:t>    + BBQ &amp; Cheese</a:t>
             </a:r>
           </a:p>
           <a:p>
@@ -11506,7 +11484,7 @@
         <p:spPr>
           <a:xfrm>
             <a:off x="4523526" y="1330503"/>
-            <a:ext cx="1280708" cy="5678433"/>
+            <a:ext cx="1280708" cy="4847436"/>
           </a:xfrm>
           <a:prstGeom prst="rect">
             <a:avLst/>
@@ -11543,30 +11521,6 @@
                 <a:sym typeface="Calibri"/>
               </a:rPr>
               <a:t>$4.00</a:t>
-            </a:r>
-          </a:p>
-          <a:p>
-            <a:pPr algn="r"/>
-            <a:r>
-              <a:rPr lang="en-US" sz="2700" b="1" dirty="0">
-                <a:latin typeface="Calibri"/>
-                <a:ea typeface="Calibri"/>
-                <a:cs typeface="Calibri"/>
-                <a:sym typeface="Calibri"/>
-              </a:rPr>
-              <a:t>$4.00</a:t>
-            </a:r>
-          </a:p>
-          <a:p>
-            <a:pPr algn="r"/>
-            <a:r>
-              <a:rPr lang="en-US" sz="2700" b="1" dirty="0">
-                <a:latin typeface="Calibri"/>
-                <a:ea typeface="Calibri"/>
-                <a:cs typeface="Calibri"/>
-                <a:sym typeface="Calibri"/>
-              </a:rPr>
-              <a:t>$8.00</a:t>
             </a:r>
           </a:p>
           <a:p>
@@ -12125,7 +12079,7 @@
         </p:nvSpPr>
         <p:spPr>
           <a:xfrm>
-            <a:off x="454037" y="7269795"/>
+            <a:off x="443835" y="7188982"/>
             <a:ext cx="5639850" cy="2305593"/>
           </a:xfrm>
           <a:prstGeom prst="roundRect">
@@ -12194,7 +12148,7 @@
         </p:nvSpPr>
         <p:spPr>
           <a:xfrm>
-            <a:off x="439321" y="7970495"/>
+            <a:off x="429119" y="7889682"/>
             <a:ext cx="4048572" cy="1523450"/>
           </a:xfrm>
           <a:prstGeom prst="rect">
@@ -12259,7 +12213,7 @@
         </p:nvSpPr>
         <p:spPr>
           <a:xfrm>
-            <a:off x="4622207" y="7958267"/>
+            <a:off x="4612005" y="7877454"/>
             <a:ext cx="1303499" cy="1523450"/>
           </a:xfrm>
           <a:prstGeom prst="rect">

--- a/Assets/Menu/TournamentMenu/TournamentMenu.pptx
+++ b/Assets/Menu/TournamentMenu/TournamentMenu.pptx
@@ -10633,7 +10633,7 @@
         <p:spPr>
           <a:xfrm>
             <a:off x="429119" y="361061"/>
-            <a:ext cx="5595904" cy="6069556"/>
+            <a:ext cx="5595904" cy="5781322"/>
           </a:xfrm>
           <a:prstGeom prst="roundRect">
             <a:avLst>
@@ -11003,7 +11003,7 @@
         <p:spPr>
           <a:xfrm>
             <a:off x="623942" y="1330503"/>
-            <a:ext cx="4038729" cy="4847436"/>
+            <a:ext cx="4038729" cy="4431938"/>
           </a:xfrm>
           <a:prstGeom prst="rect">
             <a:avLst/>
@@ -11027,17 +11027,6 @@
                 <a:sym typeface="Calibri"/>
               </a:rPr>
               <a:t>Pulled Pork Nachos</a:t>
-            </a:r>
-          </a:p>
-          <a:p>
-            <a:r>
-              <a:rPr lang="en-US" sz="2700" b="1" dirty="0">
-                <a:latin typeface="Calibri"/>
-                <a:ea typeface="Calibri"/>
-                <a:cs typeface="Calibri"/>
-                <a:sym typeface="Calibri"/>
-              </a:rPr>
-              <a:t>French Fries</a:t>
             </a:r>
           </a:p>
           <a:p>
@@ -11484,7 +11473,7 @@
         <p:spPr>
           <a:xfrm>
             <a:off x="4523526" y="1330503"/>
-            <a:ext cx="1280708" cy="4847436"/>
+            <a:ext cx="1280708" cy="4431938"/>
           </a:xfrm>
           <a:prstGeom prst="rect">
             <a:avLst/>
@@ -11509,18 +11498,6 @@
                 <a:sym typeface="Calibri"/>
               </a:rPr>
               <a:t>$6.00</a:t>
-            </a:r>
-          </a:p>
-          <a:p>
-            <a:pPr algn="r"/>
-            <a:r>
-              <a:rPr lang="en-US" sz="2700" b="1" dirty="0">
-                <a:latin typeface="Calibri"/>
-                <a:ea typeface="Calibri"/>
-                <a:cs typeface="Calibri"/>
-                <a:sym typeface="Calibri"/>
-              </a:rPr>
-              <a:t>$4.00</a:t>
             </a:r>
           </a:p>
           <a:p>
